--- a/output/meta/2026-03-28_ai-agent-team-overview/ai-agent-team-overview_slides.pptx
+++ b/output/meta/2026-03-28_ai-agent-team-overview/ai-agent-team-overview_slides.pptx
@@ -3148,7 +3148,9 @@
           <a:bodyPr rtlCol="0" anchor="ctr"/>
           <a:lstStyle/>
           <a:p>
-            <a:pPr algn="ctr"/>
+            <a:pPr algn="ctr">
+              <a:defRPr/>
+            </a:pPr>
           </a:p>
         </p:txBody>
       </p:sp>
@@ -3183,6 +3185,7 @@
               </a:defRPr>
             </a:pPr>
             <a:r>
+              <a:rPr/>
               <a:t>AI Agent Team</a:t>
             </a:r>
           </a:p>
@@ -3196,7 +3199,7 @@
         </p:nvSpPr>
         <p:spPr>
           <a:xfrm>
-            <a:off x="640080" y="1188720"/>
+            <a:off x="640080" y="1298448"/>
             <a:ext cx="5943600" cy="457200"/>
           </a:xfrm>
           <a:prstGeom prst="rect">
@@ -3219,6 +3222,7 @@
               </a:defRPr>
             </a:pPr>
             <a:r>
+              <a:rPr/>
               <a:t>学びをデザインする9人のエージェント会社</a:t>
             </a:r>
           </a:p>
@@ -3265,7 +3269,9 @@
           <a:bodyPr rtlCol="0" anchor="ctr"/>
           <a:lstStyle/>
           <a:p>
-            <a:pPr algn="ctr"/>
+            <a:pPr algn="ctr">
+              <a:defRPr/>
+            </a:pPr>
           </a:p>
         </p:txBody>
       </p:sp>
@@ -3300,6 +3306,7 @@
               </a:defRPr>
             </a:pPr>
             <a:r>
+              <a:rPr/>
               <a:t>Learning Design Lab | CEO: たまさん（家庭医 × 教育者 × AI実践者）</a:t>
             </a:r>
           </a:p>
@@ -3344,7 +3351,9 @@
           <a:bodyPr rtlCol="0" anchor="ctr"/>
           <a:lstStyle/>
           <a:p>
-            <a:pPr algn="ctr"/>
+            <a:pPr algn="ctr">
+              <a:defRPr/>
+            </a:pPr>
           </a:p>
         </p:txBody>
       </p:sp>
@@ -3379,6 +3388,7 @@
               </a:defRPr>
             </a:pPr>
             <a:r>
+              <a:rPr/>
               <a:t>9</a:t>
             </a:r>
           </a:p>
@@ -3392,7 +3402,7 @@
         </p:nvSpPr>
         <p:spPr>
           <a:xfrm>
-            <a:off x="6400800" y="1508760"/>
+            <a:off x="6400800" y="1773936"/>
             <a:ext cx="2377440" cy="457200"/>
           </a:xfrm>
           <a:prstGeom prst="rect">
@@ -3415,6 +3425,7 @@
               </a:defRPr>
             </a:pPr>
             <a:r>
+              <a:rPr/>
               <a:t>Agents</a:t>
             </a:r>
           </a:p>
@@ -3485,7 +3496,9 @@
           <a:bodyPr rtlCol="0" anchor="ctr"/>
           <a:lstStyle/>
           <a:p>
-            <a:pPr algn="ctr"/>
+            <a:pPr algn="ctr">
+              <a:defRPr/>
+            </a:pPr>
           </a:p>
         </p:txBody>
       </p:sp>
@@ -3520,6 +3533,7 @@
               </a:defRPr>
             </a:pPr>
             <a:r>
+              <a:rPr/>
               <a:t>Publisher &amp; Marketer — 配信と成長</a:t>
             </a:r>
           </a:p>
@@ -3534,7 +3548,7 @@
         <p:spPr>
           <a:xfrm>
             <a:off x="640080" y="914400"/>
-            <a:ext cx="3840480" cy="365760"/>
+            <a:ext cx="3840480" cy="375920"/>
           </a:xfrm>
           <a:prstGeom prst="rect">
             <a:avLst/>
@@ -3556,6 +3570,7 @@
               </a:defRPr>
             </a:pPr>
             <a:r>
+              <a:rPr/>
               <a:t>Publisher — 配信部長</a:t>
             </a:r>
           </a:p>
@@ -3602,7 +3617,9 @@
           <a:bodyPr rtlCol="0" anchor="ctr"/>
           <a:lstStyle/>
           <a:p>
-            <a:pPr algn="ctr"/>
+            <a:pPr algn="ctr">
+              <a:defRPr/>
+            </a:pPr>
           </a:p>
         </p:txBody>
       </p:sp>
@@ -3637,6 +3654,7 @@
               </a:defRPr>
             </a:pPr>
             <a:r>
+              <a:rPr/>
               <a:t>note.com — 週2-3本</a:t>
             </a:r>
           </a:p>
@@ -3683,7 +3701,9 @@
           <a:bodyPr rtlCol="0" anchor="ctr"/>
           <a:lstStyle/>
           <a:p>
-            <a:pPr algn="ctr"/>
+            <a:pPr algn="ctr">
+              <a:defRPr/>
+            </a:pPr>
           </a:p>
         </p:txBody>
       </p:sp>
@@ -3718,6 +3738,7 @@
               </a:defRPr>
             </a:pPr>
             <a:r>
+              <a:rPr/>
               <a:t>Podcast — 週1回・20-30分</a:t>
             </a:r>
           </a:p>
@@ -3764,7 +3785,9 @@
           <a:bodyPr rtlCol="0" anchor="ctr"/>
           <a:lstStyle/>
           <a:p>
-            <a:pPr algn="ctr"/>
+            <a:pPr algn="ctr">
+              <a:defRPr/>
+            </a:pPr>
           </a:p>
         </p:txBody>
       </p:sp>
@@ -3799,6 +3822,7 @@
               </a:defRPr>
             </a:pPr>
             <a:r>
+              <a:rPr/>
               <a:t>X — 毎日1-3投稿</a:t>
             </a:r>
           </a:p>
@@ -3835,6 +3859,7 @@
               </a:defRPr>
             </a:pPr>
             <a:r>
+              <a:rPr/>
               <a:t>教育モード: Scribe出力→PPTX/DOCX</a:t>
             </a:r>
           </a:p>
@@ -3871,6 +3896,7 @@
               </a:defRPr>
             </a:pPr>
             <a:r>
+              <a:rPr/>
               <a:t>トリガー: /publisher [ファイル]</a:t>
             </a:r>
           </a:p>
@@ -3885,7 +3911,7 @@
         <p:spPr>
           <a:xfrm>
             <a:off x="4846320" y="914400"/>
-            <a:ext cx="3840480" cy="365760"/>
+            <a:ext cx="3840480" cy="375920"/>
           </a:xfrm>
           <a:prstGeom prst="rect">
             <a:avLst/>
@@ -3907,6 +3933,7 @@
               </a:defRPr>
             </a:pPr>
             <a:r>
+              <a:rPr/>
               <a:t>Marketer — グロース部長</a:t>
             </a:r>
           </a:p>
@@ -3944,6 +3971,7 @@
               <a:buChar char="●"/>
             </a:pPr>
             <a:r>
+              <a:rPr/>
               <a:t>フォロワー/リスナー数トラッキング</a:t>
             </a:r>
           </a:p>
@@ -3958,6 +3986,7 @@
               <a:buChar char="●"/>
             </a:pPr>
             <a:r>
+              <a:rPr/>
               <a:t>収益ダッシュボード</a:t>
             </a:r>
           </a:p>
@@ -3972,6 +4001,7 @@
               <a:buChar char="●"/>
             </a:pPr>
             <a:r>
+              <a:rPr/>
               <a:t>成長戦略立案</a:t>
             </a:r>
           </a:p>
@@ -3986,6 +4016,7 @@
               <a:buChar char="●"/>
             </a:pPr>
             <a:r>
+              <a:rPr/>
               <a:t>ABテスト設計</a:t>
             </a:r>
           </a:p>
@@ -4022,6 +4053,7 @@
               </a:defRPr>
             </a:pPr>
             <a:r>
+              <a:rPr/>
               <a:t>トリガー: /marketer</a:t>
             </a:r>
           </a:p>
@@ -4066,7 +4098,9 @@
           <a:bodyPr rtlCol="0" anchor="ctr"/>
           <a:lstStyle/>
           <a:p>
-            <a:pPr algn="ctr"/>
+            <a:pPr algn="ctr">
+              <a:defRPr/>
+            </a:pPr>
           </a:p>
         </p:txBody>
       </p:sp>
@@ -4135,7 +4169,9 @@
           <a:bodyPr rtlCol="0" anchor="ctr"/>
           <a:lstStyle/>
           <a:p>
-            <a:pPr algn="ctr"/>
+            <a:pPr algn="ctr">
+              <a:defRPr/>
+            </a:pPr>
           </a:p>
         </p:txBody>
       </p:sp>
@@ -4170,6 +4206,7 @@
               </a:defRPr>
             </a:pPr>
             <a:r>
+              <a:rPr/>
               <a:t>パイプライン全体像 — 学習からビジネスへ</a:t>
             </a:r>
           </a:p>
@@ -4184,7 +4221,7 @@
         <p:spPr>
           <a:xfrm>
             <a:off x="640080" y="1005840"/>
-            <a:ext cx="2743200" cy="320040"/>
+            <a:ext cx="2743200" cy="340360"/>
           </a:xfrm>
           <a:prstGeom prst="rect">
             <a:avLst/>
@@ -4206,6 +4243,7 @@
               </a:defRPr>
             </a:pPr>
             <a:r>
+              <a:rPr/>
               <a:t>学習パイプライン</a:t>
             </a:r>
           </a:p>
@@ -4250,7 +4288,9 @@
           <a:bodyPr rtlCol="0" anchor="ctr"/>
           <a:lstStyle/>
           <a:p>
-            <a:pPr algn="ctr"/>
+            <a:pPr algn="ctr">
+              <a:defRPr/>
+            </a:pPr>
           </a:p>
         </p:txBody>
       </p:sp>
@@ -4285,6 +4325,7 @@
               </a:defRPr>
             </a:pPr>
             <a:r>
+              <a:rPr/>
               <a:t>Scout</a:t>
             </a:r>
           </a:p>
@@ -4321,6 +4362,7 @@
               </a:defRPr>
             </a:pPr>
             <a:r>
+              <a:rPr/>
               <a:t>→</a:t>
             </a:r>
           </a:p>
@@ -4365,7 +4407,9 @@
           <a:bodyPr rtlCol="0" anchor="ctr"/>
           <a:lstStyle/>
           <a:p>
-            <a:pPr algn="ctr"/>
+            <a:pPr algn="ctr">
+              <a:defRPr/>
+            </a:pPr>
           </a:p>
         </p:txBody>
       </p:sp>
@@ -4400,6 +4444,7 @@
               </a:defRPr>
             </a:pPr>
             <a:r>
+              <a:rPr/>
               <a:t>Verifier</a:t>
             </a:r>
           </a:p>
@@ -4436,6 +4481,7 @@
               </a:defRPr>
             </a:pPr>
             <a:r>
+              <a:rPr/>
               <a:t>→</a:t>
             </a:r>
           </a:p>
@@ -4480,7 +4526,9 @@
           <a:bodyPr rtlCol="0" anchor="ctr"/>
           <a:lstStyle/>
           <a:p>
-            <a:pPr algn="ctr"/>
+            <a:pPr algn="ctr">
+              <a:defRPr/>
+            </a:pPr>
           </a:p>
         </p:txBody>
       </p:sp>
@@ -4515,6 +4563,7 @@
               </a:defRPr>
             </a:pPr>
             <a:r>
+              <a:rPr/>
               <a:t>Analyst</a:t>
             </a:r>
           </a:p>
@@ -4551,6 +4600,7 @@
               </a:defRPr>
             </a:pPr>
             <a:r>
+              <a:rPr/>
               <a:t>→</a:t>
             </a:r>
           </a:p>
@@ -4595,7 +4645,9 @@
           <a:bodyPr rtlCol="0" anchor="ctr"/>
           <a:lstStyle/>
           <a:p>
-            <a:pPr algn="ctr"/>
+            <a:pPr algn="ctr">
+              <a:defRPr/>
+            </a:pPr>
           </a:p>
         </p:txBody>
       </p:sp>
@@ -4630,6 +4682,7 @@
               </a:defRPr>
             </a:pPr>
             <a:r>
+              <a:rPr/>
               <a:t>Conductor</a:t>
             </a:r>
           </a:p>
@@ -4666,6 +4719,7 @@
               </a:defRPr>
             </a:pPr>
             <a:r>
+              <a:rPr/>
               <a:t>→</a:t>
             </a:r>
           </a:p>
@@ -4710,7 +4764,9 @@
           <a:bodyPr rtlCol="0" anchor="ctr"/>
           <a:lstStyle/>
           <a:p>
-            <a:pPr algn="ctr"/>
+            <a:pPr algn="ctr">
+              <a:defRPr/>
+            </a:pPr>
           </a:p>
         </p:txBody>
       </p:sp>
@@ -4745,6 +4801,7 @@
               </a:defRPr>
             </a:pPr>
             <a:r>
+              <a:rPr/>
               <a:t>Scribe</a:t>
             </a:r>
           </a:p>
@@ -4781,6 +4838,7 @@
               </a:defRPr>
             </a:pPr>
             <a:r>
+              <a:rPr/>
               <a:t>→</a:t>
             </a:r>
           </a:p>
@@ -4825,7 +4883,9 @@
           <a:bodyPr rtlCol="0" anchor="ctr"/>
           <a:lstStyle/>
           <a:p>
-            <a:pPr algn="ctr"/>
+            <a:pPr algn="ctr">
+              <a:defRPr/>
+            </a:pPr>
           </a:p>
         </p:txBody>
       </p:sp>
@@ -4860,6 +4920,7 @@
               </a:defRPr>
             </a:pPr>
             <a:r>
+              <a:rPr/>
               <a:t>Librarian</a:t>
             </a:r>
           </a:p>
@@ -4904,7 +4965,9 @@
           <a:bodyPr rtlCol="0" anchor="ctr"/>
           <a:lstStyle/>
           <a:p>
-            <a:pPr algn="ctr"/>
+            <a:pPr algn="ctr">
+              <a:defRPr/>
+            </a:pPr>
           </a:p>
         </p:txBody>
       </p:sp>
@@ -4939,6 +5002,7 @@
               </a:defRPr>
             </a:pPr>
             <a:r>
+              <a:rPr/>
               <a:t>↕ クロスフロー: 調査結果→ネタ元 / 教材→有料コンテンツ ↕</a:t>
             </a:r>
           </a:p>
@@ -4983,7 +5047,9 @@
           <a:bodyPr rtlCol="0" anchor="ctr"/>
           <a:lstStyle/>
           <a:p>
-            <a:pPr algn="ctr"/>
+            <a:pPr algn="ctr">
+              <a:defRPr/>
+            </a:pPr>
           </a:p>
         </p:txBody>
       </p:sp>
@@ -4996,7 +5062,7 @@
         <p:spPr>
           <a:xfrm>
             <a:off x="640080" y="2743200"/>
-            <a:ext cx="2743200" cy="320040"/>
+            <a:ext cx="2743200" cy="340360"/>
           </a:xfrm>
           <a:prstGeom prst="rect">
             <a:avLst/>
@@ -5018,6 +5084,7 @@
               </a:defRPr>
             </a:pPr>
             <a:r>
+              <a:rPr/>
               <a:t>ビジネスパイプライン</a:t>
             </a:r>
           </a:p>
@@ -5062,7 +5129,9 @@
           <a:bodyPr rtlCol="0" anchor="ctr"/>
           <a:lstStyle/>
           <a:p>
-            <a:pPr algn="ctr"/>
+            <a:pPr algn="ctr">
+              <a:defRPr/>
+            </a:pPr>
           </a:p>
         </p:txBody>
       </p:sp>
@@ -5097,6 +5166,7 @@
               </a:defRPr>
             </a:pPr>
             <a:r>
+              <a:rPr/>
               <a:t>Scout</a:t>
             </a:r>
           </a:p>
@@ -5133,6 +5203,7 @@
               </a:defRPr>
             </a:pPr>
             <a:r>
+              <a:rPr/>
               <a:t>→</a:t>
             </a:r>
           </a:p>
@@ -5177,7 +5248,9 @@
           <a:bodyPr rtlCol="0" anchor="ctr"/>
           <a:lstStyle/>
           <a:p>
-            <a:pPr algn="ctr"/>
+            <a:pPr algn="ctr">
+              <a:defRPr/>
+            </a:pPr>
           </a:p>
         </p:txBody>
       </p:sp>
@@ -5212,6 +5285,7 @@
               </a:defRPr>
             </a:pPr>
             <a:r>
+              <a:rPr/>
               <a:t>Analyst</a:t>
             </a:r>
           </a:p>
@@ -5248,6 +5322,7 @@
               </a:defRPr>
             </a:pPr>
             <a:r>
+              <a:rPr/>
               <a:t>→</a:t>
             </a:r>
           </a:p>
@@ -5292,7 +5367,9 @@
           <a:bodyPr rtlCol="0" anchor="ctr"/>
           <a:lstStyle/>
           <a:p>
-            <a:pPr algn="ctr"/>
+            <a:pPr algn="ctr">
+              <a:defRPr/>
+            </a:pPr>
           </a:p>
         </p:txBody>
       </p:sp>
@@ -5327,6 +5404,7 @@
               </a:defRPr>
             </a:pPr>
             <a:r>
+              <a:rPr/>
               <a:t>CEO</a:t>
             </a:r>
           </a:p>
@@ -5363,6 +5441,7 @@
               </a:defRPr>
             </a:pPr>
             <a:r>
+              <a:rPr/>
               <a:t>→</a:t>
             </a:r>
           </a:p>
@@ -5407,7 +5486,9 @@
           <a:bodyPr rtlCol="0" anchor="ctr"/>
           <a:lstStyle/>
           <a:p>
-            <a:pPr algn="ctr"/>
+            <a:pPr algn="ctr">
+              <a:defRPr/>
+            </a:pPr>
           </a:p>
         </p:txBody>
       </p:sp>
@@ -5442,6 +5523,7 @@
               </a:defRPr>
             </a:pPr>
             <a:r>
+              <a:rPr/>
               <a:t>Writer</a:t>
             </a:r>
           </a:p>
@@ -5478,6 +5560,7 @@
               </a:defRPr>
             </a:pPr>
             <a:r>
+              <a:rPr/>
               <a:t>→</a:t>
             </a:r>
           </a:p>
@@ -5522,7 +5605,9 @@
           <a:bodyPr rtlCol="0" anchor="ctr"/>
           <a:lstStyle/>
           <a:p>
-            <a:pPr algn="ctr"/>
+            <a:pPr algn="ctr">
+              <a:defRPr/>
+            </a:pPr>
           </a:p>
         </p:txBody>
       </p:sp>
@@ -5557,6 +5642,7 @@
               </a:defRPr>
             </a:pPr>
             <a:r>
+              <a:rPr/>
               <a:t>Editor</a:t>
             </a:r>
           </a:p>
@@ -5593,6 +5679,7 @@
               </a:defRPr>
             </a:pPr>
             <a:r>
+              <a:rPr/>
               <a:t>→</a:t>
             </a:r>
           </a:p>
@@ -5637,7 +5724,9 @@
           <a:bodyPr rtlCol="0" anchor="ctr"/>
           <a:lstStyle/>
           <a:p>
-            <a:pPr algn="ctr"/>
+            <a:pPr algn="ctr">
+              <a:defRPr/>
+            </a:pPr>
           </a:p>
         </p:txBody>
       </p:sp>
@@ -5672,6 +5761,7 @@
               </a:defRPr>
             </a:pPr>
             <a:r>
+              <a:rPr/>
               <a:t>CEO</a:t>
             </a:r>
           </a:p>
@@ -5708,6 +5798,7 @@
               </a:defRPr>
             </a:pPr>
             <a:r>
+              <a:rPr/>
               <a:t>→</a:t>
             </a:r>
           </a:p>
@@ -5752,7 +5843,9 @@
           <a:bodyPr rtlCol="0" anchor="ctr"/>
           <a:lstStyle/>
           <a:p>
-            <a:pPr algn="ctr"/>
+            <a:pPr algn="ctr">
+              <a:defRPr/>
+            </a:pPr>
           </a:p>
         </p:txBody>
       </p:sp>
@@ -5787,6 +5880,7 @@
               </a:defRPr>
             </a:pPr>
             <a:r>
+              <a:rPr/>
               <a:t>Publisher</a:t>
             </a:r>
           </a:p>
@@ -5823,6 +5917,7 @@
               </a:defRPr>
             </a:pPr>
             <a:r>
+              <a:rPr/>
               <a:t>→</a:t>
             </a:r>
           </a:p>
@@ -5867,7 +5962,9 @@
           <a:bodyPr rtlCol="0" anchor="ctr"/>
           <a:lstStyle/>
           <a:p>
-            <a:pPr algn="ctr"/>
+            <a:pPr algn="ctr">
+              <a:defRPr/>
+            </a:pPr>
           </a:p>
         </p:txBody>
       </p:sp>
@@ -5902,6 +5999,7 @@
               </a:defRPr>
             </a:pPr>
             <a:r>
+              <a:rPr/>
               <a:t>Marketer</a:t>
             </a:r>
           </a:p>
@@ -5946,7 +6044,9 @@
           <a:bodyPr rtlCol="0" anchor="ctr"/>
           <a:lstStyle/>
           <a:p>
-            <a:pPr algn="ctr"/>
+            <a:pPr algn="ctr">
+              <a:defRPr/>
+            </a:pPr>
           </a:p>
         </p:txBody>
       </p:sp>
@@ -5991,7 +6091,9 @@
           <a:bodyPr rtlCol="0" anchor="ctr"/>
           <a:lstStyle/>
           <a:p>
-            <a:pPr algn="ctr"/>
+            <a:pPr algn="ctr">
+              <a:defRPr/>
+            </a:pPr>
           </a:p>
         </p:txBody>
       </p:sp>
@@ -6026,6 +6128,7 @@
               </a:defRPr>
             </a:pPr>
             <a:r>
+              <a:rPr/>
               <a:t>学習チームの調査結果がビジネスチームのネタ元に。Scribeの教材が有料コンテンツに。</a:t>
             </a:r>
           </a:p>
@@ -6096,7 +6199,9 @@
           <a:bodyPr rtlCol="0" anchor="ctr"/>
           <a:lstStyle/>
           <a:p>
-            <a:pPr algn="ctr"/>
+            <a:pPr algn="ctr">
+              <a:defRPr/>
+            </a:pPr>
           </a:p>
         </p:txBody>
       </p:sp>
@@ -6131,6 +6236,7 @@
               </a:defRPr>
             </a:pPr>
             <a:r>
+              <a:rPr/>
               <a:t>進化ロードマップ</a:t>
             </a:r>
           </a:p>
@@ -6177,7 +6283,9 @@
           <a:bodyPr rtlCol="0" anchor="ctr"/>
           <a:lstStyle/>
           <a:p>
-            <a:pPr algn="ctr"/>
+            <a:pPr algn="ctr">
+              <a:defRPr/>
+            </a:pPr>
           </a:p>
         </p:txBody>
       </p:sp>
@@ -6212,6 +6320,7 @@
               </a:defRPr>
             </a:pPr>
             <a:r>
+              <a:rPr/>
               <a:t>Phase 1 (Now)</a:t>
             </a:r>
           </a:p>
@@ -6226,7 +6335,7 @@
         <p:spPr>
           <a:xfrm>
             <a:off x="594360" y="1371600"/>
-            <a:ext cx="2377440" cy="365760"/>
+            <a:ext cx="2377440" cy="375920"/>
           </a:xfrm>
           <a:prstGeom prst="rect">
             <a:avLst/>
@@ -6248,6 +6357,7 @@
               </a:defRPr>
             </a:pPr>
             <a:r>
+              <a:rPr/>
               <a:t>基盤強化</a:t>
             </a:r>
           </a:p>
@@ -6285,6 +6395,7 @@
               <a:buChar char="●"/>
             </a:pPr>
             <a:r>
+              <a:rPr/>
               <a:t>cron安定化・認証セッション維持</a:t>
             </a:r>
           </a:p>
@@ -6299,6 +6410,7 @@
               <a:buChar char="●"/>
             </a:pPr>
             <a:r>
+              <a:rPr/>
               <a:t>モバイル連携（Claude Code Channels）</a:t>
             </a:r>
           </a:p>
@@ -6313,6 +6425,7 @@
               <a:buChar char="●"/>
             </a:pPr>
             <a:r>
+              <a:rPr/>
               <a:t>ダッシュボード改善</a:t>
             </a:r>
           </a:p>
@@ -6359,7 +6472,9 @@
           <a:bodyPr rtlCol="0" anchor="ctr"/>
           <a:lstStyle/>
           <a:p>
-            <a:pPr algn="ctr"/>
+            <a:pPr algn="ctr">
+              <a:defRPr/>
+            </a:pPr>
           </a:p>
         </p:txBody>
       </p:sp>
@@ -6394,6 +6509,7 @@
               </a:defRPr>
             </a:pPr>
             <a:r>
+              <a:rPr/>
               <a:t>Phase 2 (Next)</a:t>
             </a:r>
           </a:p>
@@ -6408,7 +6524,7 @@
         <p:spPr>
           <a:xfrm>
             <a:off x="3474720" y="1371600"/>
-            <a:ext cx="2377440" cy="365760"/>
+            <a:ext cx="2377440" cy="375920"/>
           </a:xfrm>
           <a:prstGeom prst="rect">
             <a:avLst/>
@@ -6430,6 +6546,7 @@
               </a:defRPr>
             </a:pPr>
             <a:r>
+              <a:rPr/>
               <a:t>自律化</a:t>
             </a:r>
           </a:p>
@@ -6467,6 +6584,7 @@
               <a:buChar char="●"/>
             </a:pPr>
             <a:r>
+              <a:rPr/>
               <a:t>秘書Agent（進捗横断管理）</a:t>
             </a:r>
           </a:p>
@@ -6481,6 +6599,7 @@
               <a:buChar char="●"/>
             </a:pPr>
             <a:r>
+              <a:rPr/>
               <a:t>A2Aプロトコル（エージェント間通信標準化）</a:t>
             </a:r>
           </a:p>
@@ -6495,6 +6614,7 @@
               <a:buChar char="●"/>
             </a:pPr>
             <a:r>
+              <a:rPr/>
               <a:t>n8nワークフロー（可視化・エラー通知）</a:t>
             </a:r>
           </a:p>
@@ -6541,7 +6661,9 @@
           <a:bodyPr rtlCol="0" anchor="ctr"/>
           <a:lstStyle/>
           <a:p>
-            <a:pPr algn="ctr"/>
+            <a:pPr algn="ctr">
+              <a:defRPr/>
+            </a:pPr>
           </a:p>
         </p:txBody>
       </p:sp>
@@ -6576,6 +6698,7 @@
               </a:defRPr>
             </a:pPr>
             <a:r>
+              <a:rPr/>
               <a:t>Phase 3 (Future)</a:t>
             </a:r>
           </a:p>
@@ -6590,7 +6713,7 @@
         <p:spPr>
           <a:xfrm>
             <a:off x="6355080" y="1371600"/>
-            <a:ext cx="2377440" cy="365760"/>
+            <a:ext cx="2377440" cy="375920"/>
           </a:xfrm>
           <a:prstGeom prst="rect">
             <a:avLst/>
@@ -6612,6 +6735,7 @@
               </a:defRPr>
             </a:pPr>
             <a:r>
+              <a:rPr/>
               <a:t>マルチLLM拡張</a:t>
             </a:r>
           </a:p>
@@ -6649,6 +6773,7 @@
               <a:buChar char="●"/>
             </a:pPr>
             <a:r>
+              <a:rPr/>
               <a:t>Gemini連携（長文コンテキスト活用）</a:t>
             </a:r>
           </a:p>
@@ -6663,6 +6788,7 @@
               <a:buChar char="●"/>
             </a:pPr>
             <a:r>
+              <a:rPr/>
               <a:t>NotebookLM（ポッドキャスト自動生成）</a:t>
             </a:r>
           </a:p>
@@ -6677,6 +6803,7 @@
               <a:buChar char="●"/>
             </a:pPr>
             <a:r>
+              <a:rPr/>
               <a:t>外部API統合</a:t>
             </a:r>
           </a:p>
@@ -6747,7 +6874,9 @@
           <a:bodyPr rtlCol="0" anchor="ctr"/>
           <a:lstStyle/>
           <a:p>
-            <a:pPr algn="ctr"/>
+            <a:pPr algn="ctr">
+              <a:defRPr/>
+            </a:pPr>
           </a:p>
         </p:txBody>
       </p:sp>
@@ -6782,6 +6911,7 @@
               </a:defRPr>
             </a:pPr>
             <a:r>
+              <a:rPr/>
               <a:t>注目アイデア4選</a:t>
             </a:r>
           </a:p>
@@ -6828,7 +6958,9 @@
           <a:bodyPr rtlCol="0" anchor="ctr"/>
           <a:lstStyle/>
           <a:p>
-            <a:pPr algn="ctr"/>
+            <a:pPr algn="ctr">
+              <a:defRPr/>
+            </a:pPr>
           </a:p>
         </p:txBody>
       </p:sp>
@@ -6871,7 +7003,9 @@
           <a:bodyPr rtlCol="0" anchor="ctr"/>
           <a:lstStyle/>
           <a:p>
-            <a:pPr algn="ctr"/>
+            <a:pPr algn="ctr">
+              <a:defRPr/>
+            </a:pPr>
           </a:p>
         </p:txBody>
       </p:sp>
@@ -6906,6 +7040,7 @@
               </a:defRPr>
             </a:pPr>
             <a:r>
+              <a:rPr/>
               <a:t>1</a:t>
             </a:r>
           </a:p>
@@ -6942,6 +7077,7 @@
               </a:defRPr>
             </a:pPr>
             <a:r>
+              <a:rPr/>
               <a:t>秘書Agent</a:t>
             </a:r>
           </a:p>
@@ -6978,6 +7114,7 @@
               </a:defRPr>
             </a:pPr>
             <a:r>
+              <a:rPr/>
               <a:t>「誰がどこまで進んだか」を横断管理。Conductorの負荷分散</a:t>
             </a:r>
           </a:p>
@@ -7024,7 +7161,9 @@
           <a:bodyPr rtlCol="0" anchor="ctr"/>
           <a:lstStyle/>
           <a:p>
-            <a:pPr algn="ctr"/>
+            <a:pPr algn="ctr">
+              <a:defRPr/>
+            </a:pPr>
           </a:p>
         </p:txBody>
       </p:sp>
@@ -7067,7 +7206,9 @@
           <a:bodyPr rtlCol="0" anchor="ctr"/>
           <a:lstStyle/>
           <a:p>
-            <a:pPr algn="ctr"/>
+            <a:pPr algn="ctr">
+              <a:defRPr/>
+            </a:pPr>
           </a:p>
         </p:txBody>
       </p:sp>
@@ -7102,6 +7243,7 @@
               </a:defRPr>
             </a:pPr>
             <a:r>
+              <a:rPr/>
               <a:t>2</a:t>
             </a:r>
           </a:p>
@@ -7138,6 +7280,7 @@
               </a:defRPr>
             </a:pPr>
             <a:r>
+              <a:rPr/>
               <a:t>A2Aプロトコル</a:t>
             </a:r>
           </a:p>
@@ -7174,6 +7317,7 @@
               </a:defRPr>
             </a:pPr>
             <a:r>
+              <a:rPr/>
               <a:t>Agent Cardによるサービスディスカバリ。動的ルーティング</a:t>
             </a:r>
           </a:p>
@@ -7220,7 +7364,9 @@
           <a:bodyPr rtlCol="0" anchor="ctr"/>
           <a:lstStyle/>
           <a:p>
-            <a:pPr algn="ctr"/>
+            <a:pPr algn="ctr">
+              <a:defRPr/>
+            </a:pPr>
           </a:p>
         </p:txBody>
       </p:sp>
@@ -7263,7 +7409,9 @@
           <a:bodyPr rtlCol="0" anchor="ctr"/>
           <a:lstStyle/>
           <a:p>
-            <a:pPr algn="ctr"/>
+            <a:pPr algn="ctr">
+              <a:defRPr/>
+            </a:pPr>
           </a:p>
         </p:txBody>
       </p:sp>
@@ -7298,6 +7446,7 @@
               </a:defRPr>
             </a:pPr>
             <a:r>
+              <a:rPr/>
               <a:t>3</a:t>
             </a:r>
           </a:p>
@@ -7334,6 +7483,7 @@
               </a:defRPr>
             </a:pPr>
             <a:r>
+              <a:rPr/>
               <a:t>n8nワークフロー</a:t>
             </a:r>
           </a:p>
@@ -7370,6 +7520,7 @@
               </a:defRPr>
             </a:pPr>
             <a:r>
+              <a:rPr/>
               <a:t>パイプラインの可視化。エラー通知・リトライ一元管理</a:t>
             </a:r>
           </a:p>
@@ -7416,7 +7567,9 @@
           <a:bodyPr rtlCol="0" anchor="ctr"/>
           <a:lstStyle/>
           <a:p>
-            <a:pPr algn="ctr"/>
+            <a:pPr algn="ctr">
+              <a:defRPr/>
+            </a:pPr>
           </a:p>
         </p:txBody>
       </p:sp>
@@ -7459,7 +7612,9 @@
           <a:bodyPr rtlCol="0" anchor="ctr"/>
           <a:lstStyle/>
           <a:p>
-            <a:pPr algn="ctr"/>
+            <a:pPr algn="ctr">
+              <a:defRPr/>
+            </a:pPr>
           </a:p>
         </p:txBody>
       </p:sp>
@@ -7494,6 +7649,7 @@
               </a:defRPr>
             </a:pPr>
             <a:r>
+              <a:rPr/>
               <a:t>4</a:t>
             </a:r>
           </a:p>
@@ -7530,6 +7686,7 @@
               </a:defRPr>
             </a:pPr>
             <a:r>
+              <a:rPr/>
               <a:t>Gemini × NotebookLM</a:t>
             </a:r>
           </a:p>
@@ -7566,6 +7723,7 @@
               </a:defRPr>
             </a:pPr>
             <a:r>
+              <a:rPr/>
               <a:t>マルチLLM活用。ポッドキャスト音声自動生成の可能性</a:t>
             </a:r>
           </a:p>
@@ -7636,7 +7794,9 @@
           <a:bodyPr rtlCol="0" anchor="ctr"/>
           <a:lstStyle/>
           <a:p>
-            <a:pPr algn="ctr"/>
+            <a:pPr algn="ctr">
+              <a:defRPr/>
+            </a:pPr>
           </a:p>
         </p:txBody>
       </p:sp>
@@ -7671,6 +7831,7 @@
               </a:defRPr>
             </a:pPr>
             <a:r>
+              <a:rPr/>
               <a:t>Vision — たまさんが判断に集中できる世界</a:t>
             </a:r>
           </a:p>
@@ -7715,7 +7876,9 @@
           <a:bodyPr rtlCol="0" anchor="ctr"/>
           <a:lstStyle/>
           <a:p>
-            <a:pPr algn="ctr"/>
+            <a:pPr algn="ctr">
+              <a:defRPr/>
+            </a:pPr>
           </a:p>
         </p:txBody>
       </p:sp>
@@ -7760,7 +7923,9 @@
           <a:bodyPr rtlCol="0" anchor="ctr"/>
           <a:lstStyle/>
           <a:p>
-            <a:pPr algn="ctr"/>
+            <a:pPr algn="ctr">
+              <a:defRPr/>
+            </a:pPr>
           </a:p>
         </p:txBody>
       </p:sp>
@@ -7795,10 +7960,12 @@
               </a:defRPr>
             </a:pPr>
             <a:r>
+              <a:rPr/>
               <a:t>情報収集・分析・制作・配信…すべてをエージェントが担い、</a:t>
             </a:r>
             <a:br/>
             <a:r>
+              <a:rPr/>
               <a:t>たまさんは「何を学ぶか」「何を届けるか」の判断だけに集中する</a:t>
             </a:r>
           </a:p>
@@ -7843,7 +8010,9 @@
           <a:bodyPr rtlCol="0" anchor="ctr"/>
           <a:lstStyle/>
           <a:p>
-            <a:pPr algn="ctr"/>
+            <a:pPr algn="ctr">
+              <a:defRPr/>
+            </a:pPr>
           </a:p>
         </p:txBody>
       </p:sp>
@@ -7856,7 +8025,7 @@
         <p:spPr>
           <a:xfrm>
             <a:off x="594360" y="2377440"/>
-            <a:ext cx="2377440" cy="365760"/>
+            <a:ext cx="2377440" cy="393191"/>
           </a:xfrm>
           <a:prstGeom prst="rect">
             <a:avLst/>
@@ -7878,6 +8047,7 @@
               </a:defRPr>
             </a:pPr>
             <a:r>
+              <a:rPr/>
               <a:t>現在</a:t>
             </a:r>
           </a:p>
@@ -7914,6 +8084,7 @@
               </a:defRPr>
             </a:pPr>
             <a:r>
+              <a:rPr/>
               <a:t>週5-8時間の関与（方向性決定・最終承認・声入れ）</a:t>
             </a:r>
           </a:p>
@@ -7958,7 +8129,9 @@
           <a:bodyPr rtlCol="0" anchor="ctr"/>
           <a:lstStyle/>
           <a:p>
-            <a:pPr algn="ctr"/>
+            <a:pPr algn="ctr">
+              <a:defRPr/>
+            </a:pPr>
           </a:p>
         </p:txBody>
       </p:sp>
@@ -7971,7 +8144,7 @@
         <p:spPr>
           <a:xfrm>
             <a:off x="3474720" y="2377440"/>
-            <a:ext cx="2377440" cy="365760"/>
+            <a:ext cx="2377440" cy="393191"/>
           </a:xfrm>
           <a:prstGeom prst="rect">
             <a:avLst/>
@@ -7993,6 +8166,7 @@
               </a:defRPr>
             </a:pPr>
             <a:r>
+              <a:rPr/>
               <a:t>目標</a:t>
             </a:r>
           </a:p>
@@ -8029,6 +8203,7 @@
               </a:defRPr>
             </a:pPr>
             <a:r>
+              <a:rPr/>
               <a:t>判断以外の作業時間をゼロに近づける</a:t>
             </a:r>
           </a:p>
@@ -8073,7 +8248,9 @@
           <a:bodyPr rtlCol="0" anchor="ctr"/>
           <a:lstStyle/>
           <a:p>
-            <a:pPr algn="ctr"/>
+            <a:pPr algn="ctr">
+              <a:defRPr/>
+            </a:pPr>
           </a:p>
         </p:txBody>
       </p:sp>
@@ -8086,7 +8263,7 @@
         <p:spPr>
           <a:xfrm>
             <a:off x="6355080" y="2377440"/>
-            <a:ext cx="2377440" cy="365760"/>
+            <a:ext cx="2377440" cy="393191"/>
           </a:xfrm>
           <a:prstGeom prst="rect">
             <a:avLst/>
@@ -8108,6 +8285,7 @@
               </a:defRPr>
             </a:pPr>
             <a:r>
+              <a:rPr/>
               <a:t>最終形</a:t>
             </a:r>
           </a:p>
@@ -8144,6 +8322,7 @@
               </a:defRPr>
             </a:pPr>
             <a:r>
+              <a:rPr/>
               <a:t>学びと発信が自然に回り続けるエコシステム</a:t>
             </a:r>
           </a:p>
@@ -8180,6 +8359,7 @@
               </a:defRPr>
             </a:pPr>
             <a:r>
+              <a:rPr/>
               <a:t>AI Agent Team | Learning Design Lab | 2026-03-28</a:t>
             </a:r>
           </a:p>
@@ -8250,7 +8430,9 @@
           <a:bodyPr rtlCol="0" anchor="ctr"/>
           <a:lstStyle/>
           <a:p>
-            <a:pPr algn="ctr"/>
+            <a:pPr algn="ctr">
+              <a:defRPr/>
+            </a:pPr>
           </a:p>
         </p:txBody>
       </p:sp>
@@ -8285,6 +8467,7 @@
               </a:defRPr>
             </a:pPr>
             <a:r>
+              <a:rPr/>
               <a:t>なぜAIエージェントチーム？</a:t>
             </a:r>
           </a:p>
@@ -8299,7 +8482,7 @@
         <p:spPr>
           <a:xfrm>
             <a:off x="640080" y="914400"/>
-            <a:ext cx="1828800" cy="274320"/>
+            <a:ext cx="1828800" cy="301752"/>
           </a:xfrm>
           <a:prstGeom prst="rect">
             <a:avLst/>
@@ -8321,6 +8504,7 @@
               </a:defRPr>
             </a:pPr>
             <a:r>
+              <a:rPr/>
               <a:t>課題</a:t>
             </a:r>
           </a:p>
@@ -8367,7 +8551,9 @@
           <a:bodyPr rtlCol="0" anchor="ctr"/>
           <a:lstStyle/>
           <a:p>
-            <a:pPr algn="ctr"/>
+            <a:pPr algn="ctr">
+              <a:defRPr/>
+            </a:pPr>
           </a:p>
         </p:txBody>
       </p:sp>
@@ -8402,6 +8588,7 @@
               </a:defRPr>
             </a:pPr>
             <a:r>
+              <a:rPr/>
               <a:t>情報過多: 医療×AI×教育、毎日膨大な情報が流れる</a:t>
             </a:r>
           </a:p>
@@ -8448,7 +8635,9 @@
           <a:bodyPr rtlCol="0" anchor="ctr"/>
           <a:lstStyle/>
           <a:p>
-            <a:pPr algn="ctr"/>
+            <a:pPr algn="ctr">
+              <a:defRPr/>
+            </a:pPr>
           </a:p>
         </p:txBody>
       </p:sp>
@@ -8483,6 +8672,7 @@
               </a:defRPr>
             </a:pPr>
             <a:r>
+              <a:rPr/>
               <a:t>時間不足: 臨床・教育・研究の合間に処理しきれない</a:t>
             </a:r>
           </a:p>
@@ -8529,7 +8719,9 @@
           <a:bodyPr rtlCol="0" anchor="ctr"/>
           <a:lstStyle/>
           <a:p>
-            <a:pPr algn="ctr"/>
+            <a:pPr algn="ctr">
+              <a:defRPr/>
+            </a:pPr>
           </a:p>
         </p:txBody>
       </p:sp>
@@ -8564,6 +8756,7 @@
               </a:defRPr>
             </a:pPr>
             <a:r>
+              <a:rPr/>
               <a:t>発信したい: 学びを届けたいが制作時間が足りない</a:t>
             </a:r>
           </a:p>
@@ -8578,7 +8771,7 @@
         <p:spPr>
           <a:xfrm>
             <a:off x="5029200" y="914400"/>
-            <a:ext cx="1828800" cy="274320"/>
+            <a:ext cx="1828800" cy="301752"/>
           </a:xfrm>
           <a:prstGeom prst="rect">
             <a:avLst/>
@@ -8600,6 +8793,7 @@
               </a:defRPr>
             </a:pPr>
             <a:r>
+              <a:rPr/>
               <a:t>解決策</a:t>
             </a:r>
           </a:p>
@@ -8644,7 +8838,9 @@
           <a:bodyPr rtlCol="0" anchor="ctr"/>
           <a:lstStyle/>
           <a:p>
-            <a:pPr algn="ctr"/>
+            <a:pPr algn="ctr">
+              <a:defRPr/>
+            </a:pPr>
           </a:p>
         </p:txBody>
       </p:sp>
@@ -8679,6 +8875,7 @@
               </a:defRPr>
             </a:pPr>
             <a:r>
+              <a:rPr/>
               <a:t>9人のAIエージェントが24時間稼働</a:t>
             </a:r>
           </a:p>
@@ -8723,7 +8920,9 @@
           <a:bodyPr rtlCol="0" anchor="ctr"/>
           <a:lstStyle/>
           <a:p>
-            <a:pPr algn="ctr"/>
+            <a:pPr algn="ctr">
+              <a:defRPr/>
+            </a:pPr>
           </a:p>
         </p:txBody>
       </p:sp>
@@ -8758,6 +8957,7 @@
               </a:defRPr>
             </a:pPr>
             <a:r>
+              <a:rPr/>
               <a:t>情報収集→分析→教材→コンテンツを自動化</a:t>
             </a:r>
           </a:p>
@@ -8802,7 +9002,9 @@
           <a:bodyPr rtlCol="0" anchor="ctr"/>
           <a:lstStyle/>
           <a:p>
-            <a:pPr algn="ctr"/>
+            <a:pPr algn="ctr">
+              <a:defRPr/>
+            </a:pPr>
           </a:p>
         </p:txBody>
       </p:sp>
@@ -8837,6 +9039,7 @@
               </a:defRPr>
             </a:pPr>
             <a:r>
+              <a:rPr/>
               <a:t>たまさんは「判断」と「声」に集中</a:t>
             </a:r>
           </a:p>
@@ -8881,7 +9084,9 @@
           <a:bodyPr rtlCol="0" anchor="ctr"/>
           <a:lstStyle/>
           <a:p>
-            <a:pPr algn="ctr"/>
+            <a:pPr algn="ctr">
+              <a:defRPr/>
+            </a:pPr>
           </a:p>
         </p:txBody>
       </p:sp>
@@ -8926,7 +9131,9 @@
           <a:bodyPr rtlCol="0" anchor="ctr"/>
           <a:lstStyle/>
           <a:p>
-            <a:pPr algn="ctr"/>
+            <a:pPr algn="ctr">
+              <a:defRPr/>
+            </a:pPr>
           </a:p>
         </p:txBody>
       </p:sp>
@@ -8961,6 +9168,7 @@
               </a:defRPr>
             </a:pPr>
             <a:r>
+              <a:rPr/>
               <a:t>一人会社だけど、チームで動く — それがAIエージェントカンパニー</a:t>
             </a:r>
           </a:p>
@@ -9031,7 +9239,9 @@
           <a:bodyPr rtlCol="0" anchor="ctr"/>
           <a:lstStyle/>
           <a:p>
-            <a:pPr algn="ctr"/>
+            <a:pPr algn="ctr">
+              <a:defRPr/>
+            </a:pPr>
           </a:p>
         </p:txBody>
       </p:sp>
@@ -9044,7 +9254,7 @@
         <p:spPr>
           <a:xfrm>
             <a:off x="640080" y="274320"/>
-            <a:ext cx="7315200" cy="457200"/>
+            <a:ext cx="7315200" cy="482600"/>
           </a:xfrm>
           <a:prstGeom prst="rect">
             <a:avLst/>
@@ -9066,6 +9276,7 @@
               </a:defRPr>
             </a:pPr>
             <a:r>
+              <a:rPr/>
               <a:t>チーム相関図</a:t>
             </a:r>
           </a:p>
@@ -9160,7 +9371,9 @@
           <a:bodyPr rtlCol="0" anchor="ctr"/>
           <a:lstStyle/>
           <a:p>
-            <a:pPr algn="ctr"/>
+            <a:pPr algn="ctr">
+              <a:defRPr/>
+            </a:pPr>
           </a:p>
         </p:txBody>
       </p:sp>
@@ -9195,6 +9408,7 @@
               </a:defRPr>
             </a:pPr>
             <a:r>
+              <a:rPr/>
               <a:t>🔵 学習支援チーム</a:t>
             </a:r>
           </a:p>
@@ -9208,7 +9422,7 @@
         </p:nvSpPr>
         <p:spPr>
           <a:xfrm>
-            <a:off x="640080" y="777240"/>
+            <a:off x="640080" y="841247"/>
             <a:ext cx="7315200" cy="365760"/>
           </a:xfrm>
           <a:prstGeom prst="rect">
@@ -9231,6 +9445,7 @@
               </a:defRPr>
             </a:pPr>
             <a:r>
+              <a:rPr/>
               <a:t>たまさんの学びを加速する6エージェント</a:t>
             </a:r>
           </a:p>
@@ -9275,7 +9490,9 @@
           <a:bodyPr rtlCol="0" anchor="ctr"/>
           <a:lstStyle/>
           <a:p>
-            <a:pPr algn="ctr"/>
+            <a:pPr algn="ctr">
+              <a:defRPr/>
+            </a:pPr>
           </a:p>
         </p:txBody>
       </p:sp>
@@ -9288,7 +9505,7 @@
         <p:spPr>
           <a:xfrm>
             <a:off x="777240" y="1371600"/>
-            <a:ext cx="2286000" cy="365760"/>
+            <a:ext cx="2286000" cy="375920"/>
           </a:xfrm>
           <a:prstGeom prst="rect">
             <a:avLst/>
@@ -9310,6 +9527,7 @@
               </a:defRPr>
             </a:pPr>
             <a:r>
+              <a:rPr/>
               <a:t>Scout</a:t>
             </a:r>
           </a:p>
@@ -9324,7 +9542,7 @@
         <p:spPr>
           <a:xfrm>
             <a:off x="777240" y="1783080"/>
-            <a:ext cx="2286000" cy="274320"/>
+            <a:ext cx="2286000" cy="287020"/>
           </a:xfrm>
           <a:prstGeom prst="rect">
             <a:avLst/>
@@ -9346,6 +9564,7 @@
               </a:defRPr>
             </a:pPr>
             <a:r>
+              <a:rPr/>
               <a:t>リサーチ部長</a:t>
             </a:r>
           </a:p>
@@ -9390,7 +9609,9 @@
           <a:bodyPr rtlCol="0" anchor="ctr"/>
           <a:lstStyle/>
           <a:p>
-            <a:pPr algn="ctr"/>
+            <a:pPr algn="ctr">
+              <a:defRPr/>
+            </a:pPr>
           </a:p>
         </p:txBody>
       </p:sp>
@@ -9403,7 +9624,7 @@
         <p:spPr>
           <a:xfrm>
             <a:off x="3611879" y="1371600"/>
-            <a:ext cx="2286000" cy="365760"/>
+            <a:ext cx="2286000" cy="375920"/>
           </a:xfrm>
           <a:prstGeom prst="rect">
             <a:avLst/>
@@ -9425,6 +9646,7 @@
               </a:defRPr>
             </a:pPr>
             <a:r>
+              <a:rPr/>
               <a:t>Verifier</a:t>
             </a:r>
           </a:p>
@@ -9439,7 +9661,7 @@
         <p:spPr>
           <a:xfrm>
             <a:off x="3611879" y="1783080"/>
-            <a:ext cx="2286000" cy="274320"/>
+            <a:ext cx="2286000" cy="287020"/>
           </a:xfrm>
           <a:prstGeom prst="rect">
             <a:avLst/>
@@ -9461,6 +9683,7 @@
               </a:defRPr>
             </a:pPr>
             <a:r>
+              <a:rPr/>
               <a:t>検証ゲート</a:t>
             </a:r>
           </a:p>
@@ -9505,7 +9728,9 @@
           <a:bodyPr rtlCol="0" anchor="ctr"/>
           <a:lstStyle/>
           <a:p>
-            <a:pPr algn="ctr"/>
+            <a:pPr algn="ctr">
+              <a:defRPr/>
+            </a:pPr>
           </a:p>
         </p:txBody>
       </p:sp>
@@ -9518,7 +9743,7 @@
         <p:spPr>
           <a:xfrm>
             <a:off x="6446520" y="1371600"/>
-            <a:ext cx="2286000" cy="365760"/>
+            <a:ext cx="2286000" cy="375920"/>
           </a:xfrm>
           <a:prstGeom prst="rect">
             <a:avLst/>
@@ -9540,6 +9765,7 @@
               </a:defRPr>
             </a:pPr>
             <a:r>
+              <a:rPr/>
               <a:t>Analyst</a:t>
             </a:r>
           </a:p>
@@ -9554,7 +9780,7 @@
         <p:spPr>
           <a:xfrm>
             <a:off x="6446520" y="1783080"/>
-            <a:ext cx="2286000" cy="274320"/>
+            <a:ext cx="2286000" cy="287020"/>
           </a:xfrm>
           <a:prstGeom prst="rect">
             <a:avLst/>
@@ -9576,6 +9802,7 @@
               </a:defRPr>
             </a:pPr>
             <a:r>
+              <a:rPr/>
               <a:t>企画部長</a:t>
             </a:r>
           </a:p>
@@ -9620,7 +9847,9 @@
           <a:bodyPr rtlCol="0" anchor="ctr"/>
           <a:lstStyle/>
           <a:p>
-            <a:pPr algn="ctr"/>
+            <a:pPr algn="ctr">
+              <a:defRPr/>
+            </a:pPr>
           </a:p>
         </p:txBody>
       </p:sp>
@@ -9633,7 +9862,7 @@
         <p:spPr>
           <a:xfrm>
             <a:off x="777240" y="2468879"/>
-            <a:ext cx="2286000" cy="365760"/>
+            <a:ext cx="2286000" cy="375920"/>
           </a:xfrm>
           <a:prstGeom prst="rect">
             <a:avLst/>
@@ -9655,6 +9884,7 @@
               </a:defRPr>
             </a:pPr>
             <a:r>
+              <a:rPr/>
               <a:t>Conductor</a:t>
             </a:r>
           </a:p>
@@ -9669,7 +9899,7 @@
         <p:spPr>
           <a:xfrm>
             <a:off x="777240" y="2880359"/>
-            <a:ext cx="2286000" cy="274320"/>
+            <a:ext cx="2286000" cy="287020"/>
           </a:xfrm>
           <a:prstGeom prst="rect">
             <a:avLst/>
@@ -9691,6 +9921,7 @@
               </a:defRPr>
             </a:pPr>
             <a:r>
+              <a:rPr/>
               <a:t>COO</a:t>
             </a:r>
           </a:p>
@@ -9735,7 +9966,9 @@
           <a:bodyPr rtlCol="0" anchor="ctr"/>
           <a:lstStyle/>
           <a:p>
-            <a:pPr algn="ctr"/>
+            <a:pPr algn="ctr">
+              <a:defRPr/>
+            </a:pPr>
           </a:p>
         </p:txBody>
       </p:sp>
@@ -9748,7 +9981,7 @@
         <p:spPr>
           <a:xfrm>
             <a:off x="3611879" y="2468879"/>
-            <a:ext cx="2286000" cy="365760"/>
+            <a:ext cx="2286000" cy="375920"/>
           </a:xfrm>
           <a:prstGeom prst="rect">
             <a:avLst/>
@@ -9770,6 +10003,7 @@
               </a:defRPr>
             </a:pPr>
             <a:r>
+              <a:rPr/>
               <a:t>Scribe</a:t>
             </a:r>
           </a:p>
@@ -9784,7 +10018,7 @@
         <p:spPr>
           <a:xfrm>
             <a:off x="3611879" y="2880359"/>
-            <a:ext cx="2286000" cy="274320"/>
+            <a:ext cx="2286000" cy="287020"/>
           </a:xfrm>
           <a:prstGeom prst="rect">
             <a:avLst/>
@@ -9806,6 +10040,7 @@
               </a:defRPr>
             </a:pPr>
             <a:r>
+              <a:rPr/>
               <a:t>教育デザイナー</a:t>
             </a:r>
           </a:p>
@@ -9850,7 +10085,9 @@
           <a:bodyPr rtlCol="0" anchor="ctr"/>
           <a:lstStyle/>
           <a:p>
-            <a:pPr algn="ctr"/>
+            <a:pPr algn="ctr">
+              <a:defRPr/>
+            </a:pPr>
           </a:p>
         </p:txBody>
       </p:sp>
@@ -9863,7 +10100,7 @@
         <p:spPr>
           <a:xfrm>
             <a:off x="6446520" y="2468879"/>
-            <a:ext cx="2286000" cy="365760"/>
+            <a:ext cx="2286000" cy="375920"/>
           </a:xfrm>
           <a:prstGeom prst="rect">
             <a:avLst/>
@@ -9885,6 +10122,7 @@
               </a:defRPr>
             </a:pPr>
             <a:r>
+              <a:rPr/>
               <a:t>Librarian</a:t>
             </a:r>
           </a:p>
@@ -9899,7 +10137,7 @@
         <p:spPr>
           <a:xfrm>
             <a:off x="6446520" y="2880359"/>
-            <a:ext cx="2286000" cy="274320"/>
+            <a:ext cx="2286000" cy="287020"/>
           </a:xfrm>
           <a:prstGeom prst="rect">
             <a:avLst/>
@@ -9921,6 +10159,7 @@
               </a:defRPr>
             </a:pPr>
             <a:r>
+              <a:rPr/>
               <a:t>ナレッジ管理</a:t>
             </a:r>
           </a:p>
@@ -9957,6 +10196,7 @@
               </a:defRPr>
             </a:pPr>
             <a:r>
+              <a:rPr/>
               <a:t>Scout → Verifier → Analyst → CEO判断 → Scribe → Librarian</a:t>
             </a:r>
           </a:p>
@@ -10001,7 +10241,9 @@
           <a:bodyPr rtlCol="0" anchor="ctr"/>
           <a:lstStyle/>
           <a:p>
-            <a:pPr algn="ctr"/>
+            <a:pPr algn="ctr">
+              <a:defRPr/>
+            </a:pPr>
           </a:p>
         </p:txBody>
       </p:sp>
@@ -10070,7 +10312,9 @@
           <a:bodyPr rtlCol="0" anchor="ctr"/>
           <a:lstStyle/>
           <a:p>
-            <a:pPr algn="ctr"/>
+            <a:pPr algn="ctr">
+              <a:defRPr/>
+            </a:pPr>
           </a:p>
         </p:txBody>
       </p:sp>
@@ -10105,6 +10349,7 @@
               </a:defRPr>
             </a:pPr>
             <a:r>
+              <a:rPr/>
               <a:t>Scout &amp; Verifier — 情報収集と検証</a:t>
             </a:r>
           </a:p>
@@ -10119,7 +10364,7 @@
         <p:spPr>
           <a:xfrm>
             <a:off x="640080" y="914400"/>
-            <a:ext cx="3840480" cy="365760"/>
+            <a:ext cx="3840480" cy="375920"/>
           </a:xfrm>
           <a:prstGeom prst="rect">
             <a:avLst/>
@@ -10141,6 +10386,7 @@
               </a:defRPr>
             </a:pPr>
             <a:r>
+              <a:rPr/>
               <a:t>Scout — リサーチ部長</a:t>
             </a:r>
           </a:p>
@@ -10178,6 +10424,7 @@
               <a:buChar char="●"/>
             </a:pPr>
             <a:r>
+              <a:rPr/>
               <a:t>並列サブエージェントで4クラスター同時調査</a:t>
             </a:r>
           </a:p>
@@ -10192,6 +10439,7 @@
               <a:buChar char="●"/>
             </a:pPr>
             <a:r>
+              <a:rPr/>
               <a:t>一次ソース（論文・公式）と二次ソース（まとめ）を区別</a:t>
             </a:r>
           </a:p>
@@ -10206,6 +10454,7 @@
               <a:buChar char="●"/>
             </a:pPr>
             <a:r>
+              <a:rPr/>
               <a:t>信頼度スコア（high/medium/low）付与</a:t>
             </a:r>
           </a:p>
@@ -10220,6 +10469,7 @@
               <a:buChar char="●"/>
             </a:pPr>
             <a:r>
+              <a:rPr/>
               <a:t>トリガー: /scout [トピック]</a:t>
             </a:r>
           </a:p>
@@ -10234,7 +10484,7 @@
         <p:spPr>
           <a:xfrm>
             <a:off x="4846320" y="914400"/>
-            <a:ext cx="3840480" cy="365760"/>
+            <a:ext cx="3840480" cy="375920"/>
           </a:xfrm>
           <a:prstGeom prst="rect">
             <a:avLst/>
@@ -10256,6 +10506,7 @@
               </a:defRPr>
             </a:pPr>
             <a:r>
+              <a:rPr/>
               <a:t>Verifier — 検証ゲート</a:t>
             </a:r>
           </a:p>
@@ -10293,6 +10544,7 @@
               <a:buChar char="●"/>
             </a:pPr>
             <a:r>
+              <a:rPr/>
               <a:t>Scout出力のファクトチェック</a:t>
             </a:r>
           </a:p>
@@ -10307,6 +10559,7 @@
               <a:buChar char="●"/>
             </a:pPr>
             <a:r>
+              <a:rPr/>
               <a:t>URL検証・ソース到達確認</a:t>
             </a:r>
           </a:p>
@@ -10321,6 +10574,7 @@
               <a:buChar char="●"/>
             </a:pPr>
             <a:r>
+              <a:rPr/>
               <a:t>信頼度の再評価</a:t>
             </a:r>
           </a:p>
@@ -10335,6 +10589,7 @@
               <a:buChar char="●"/>
             </a:pPr>
             <a:r>
+              <a:rPr/>
               <a:t>パイプライン上の品質フィルター</a:t>
             </a:r>
           </a:p>
@@ -10379,7 +10634,9 @@
           <a:bodyPr rtlCol="0" anchor="ctr"/>
           <a:lstStyle/>
           <a:p>
-            <a:pPr algn="ctr"/>
+            <a:pPr algn="ctr">
+              <a:defRPr/>
+            </a:pPr>
           </a:p>
         </p:txBody>
       </p:sp>
@@ -10448,7 +10705,9 @@
           <a:bodyPr rtlCol="0" anchor="ctr"/>
           <a:lstStyle/>
           <a:p>
-            <a:pPr algn="ctr"/>
+            <a:pPr algn="ctr">
+              <a:defRPr/>
+            </a:pPr>
           </a:p>
         </p:txBody>
       </p:sp>
@@ -10483,6 +10742,7 @@
               </a:defRPr>
             </a:pPr>
             <a:r>
+              <a:rPr/>
               <a:t>Analyst &amp; Scribe — 分析と教材化</a:t>
             </a:r>
           </a:p>
@@ -10497,7 +10757,7 @@
         <p:spPr>
           <a:xfrm>
             <a:off x="640080" y="914400"/>
-            <a:ext cx="3840480" cy="365760"/>
+            <a:ext cx="3840480" cy="375920"/>
           </a:xfrm>
           <a:prstGeom prst="rect">
             <a:avLst/>
@@ -10519,6 +10779,7 @@
               </a:defRPr>
             </a:pPr>
             <a:r>
+              <a:rPr/>
               <a:t>Analyst — 企画部長</a:t>
             </a:r>
           </a:p>
@@ -10556,6 +10817,7 @@
               <a:buChar char="●"/>
             </a:pPr>
             <a:r>
+              <a:rPr/>
               <a:t>3つのレンズで深掘り（医師×ID×AI）</a:t>
             </a:r>
           </a:p>
@@ -10570,6 +10832,7 @@
               <a:buChar char="●"/>
             </a:pPr>
             <a:r>
+              <a:rPr/>
               <a:t>Conductorの見立て＋予測</a:t>
             </a:r>
           </a:p>
@@ -10584,6 +10847,7 @@
               <a:buChar char="●"/>
             </a:pPr>
             <a:r>
+              <a:rPr/>
               <a:t>独自の切り口を発見</a:t>
             </a:r>
           </a:p>
@@ -10598,6 +10862,7 @@
               <a:buChar char="●"/>
             </a:pPr>
             <a:r>
+              <a:rPr/>
               <a:t>トリガー: /analyst [トピック]</a:t>
             </a:r>
           </a:p>
@@ -10612,7 +10877,7 @@
         <p:spPr>
           <a:xfrm>
             <a:off x="4846320" y="914400"/>
-            <a:ext cx="3840480" cy="365760"/>
+            <a:ext cx="3840480" cy="375920"/>
           </a:xfrm>
           <a:prstGeom prst="rect">
             <a:avLst/>
@@ -10634,6 +10899,7 @@
               </a:defRPr>
             </a:pPr>
             <a:r>
+              <a:rPr/>
               <a:t>Scribe — 教育デザイナー</a:t>
             </a:r>
           </a:p>
@@ -10671,6 +10937,7 @@
               <a:buChar char="●"/>
             </a:pPr>
             <a:r>
+              <a:rPr/>
               <a:t>ガニェの9教授事象に基づく設計</a:t>
             </a:r>
           </a:p>
@@ -10685,6 +10952,7 @@
               <a:buChar char="●"/>
             </a:pPr>
             <a:r>
+              <a:rPr/>
               <a:t>対象者別出力（研修医・全職員）</a:t>
             </a:r>
           </a:p>
@@ -10699,6 +10967,7 @@
               <a:buChar char="●"/>
             </a:pPr>
             <a:r>
+              <a:rPr/>
               <a:t>PPTX + DOCX自動生成</a:t>
             </a:r>
           </a:p>
@@ -10713,6 +10982,7 @@
               <a:buChar char="●"/>
             </a:pPr>
             <a:r>
+              <a:rPr/>
               <a:t>トリガー: /scribe [トピック]</a:t>
             </a:r>
           </a:p>
@@ -10757,7 +11027,9 @@
           <a:bodyPr rtlCol="0" anchor="ctr"/>
           <a:lstStyle/>
           <a:p>
-            <a:pPr algn="ctr"/>
+            <a:pPr algn="ctr">
+              <a:defRPr/>
+            </a:pPr>
           </a:p>
         </p:txBody>
       </p:sp>
@@ -10826,7 +11098,9 @@
           <a:bodyPr rtlCol="0" anchor="ctr"/>
           <a:lstStyle/>
           <a:p>
-            <a:pPr algn="ctr"/>
+            <a:pPr algn="ctr">
+              <a:defRPr/>
+            </a:pPr>
           </a:p>
         </p:txBody>
       </p:sp>
@@ -10861,6 +11135,7 @@
               </a:defRPr>
             </a:pPr>
             <a:r>
+              <a:rPr/>
               <a:t>Conductor &amp; Librarian — 統括とナレッジ</a:t>
             </a:r>
           </a:p>
@@ -10875,7 +11150,7 @@
         <p:spPr>
           <a:xfrm>
             <a:off x="640080" y="914400"/>
-            <a:ext cx="3840480" cy="365760"/>
+            <a:ext cx="3840480" cy="375920"/>
           </a:xfrm>
           <a:prstGeom prst="rect">
             <a:avLst/>
@@ -10897,6 +11172,7 @@
               </a:defRPr>
             </a:pPr>
             <a:r>
+              <a:rPr/>
               <a:t>Conductor — COO（最高執行責任者）</a:t>
             </a:r>
           </a:p>
@@ -10934,6 +11210,7 @@
               <a:buChar char="●"/>
             </a:pPr>
             <a:r>
+              <a:rPr/>
               <a:t>朝・昼・週次の3モードブリーフィング</a:t>
             </a:r>
           </a:p>
@@ -10948,6 +11225,7 @@
               <a:buChar char="●"/>
             </a:pPr>
             <a:r>
+              <a:rPr/>
               <a:t>全パイプラインのオーケストレーション</a:t>
             </a:r>
           </a:p>
@@ -10962,6 +11240,7 @@
               <a:buChar char="●"/>
             </a:pPr>
             <a:r>
+              <a:rPr/>
               <a:t>承認ゲート管理</a:t>
             </a:r>
           </a:p>
@@ -10976,6 +11255,7 @@
               <a:buChar char="●"/>
             </a:pPr>
             <a:r>
+              <a:rPr/>
               <a:t>トリガー: /briefing</a:t>
             </a:r>
           </a:p>
@@ -10990,7 +11270,7 @@
         <p:spPr>
           <a:xfrm>
             <a:off x="4846320" y="914400"/>
-            <a:ext cx="3840480" cy="365760"/>
+            <a:ext cx="3840480" cy="375920"/>
           </a:xfrm>
           <a:prstGeom prst="rect">
             <a:avLst/>
@@ -11012,6 +11292,7 @@
               </a:defRPr>
             </a:pPr>
             <a:r>
+              <a:rPr/>
               <a:t>Librarian — ナレッジ管理部長</a:t>
             </a:r>
           </a:p>
@@ -11049,6 +11330,7 @@
               <a:buChar char="●"/>
             </a:pPr>
             <a:r>
+              <a:rPr/>
               <a:t>Eloベースの関心マップ（50トピック）</a:t>
             </a:r>
           </a:p>
@@ -11063,6 +11345,7 @@
               <a:buChar char="●"/>
             </a:pPr>
             <a:r>
+              <a:rPr/>
               <a:t>❤️🎓エンゲージメント追跡</a:t>
             </a:r>
           </a:p>
@@ -11077,6 +11360,7 @@
               <a:buChar char="●"/>
             </a:pPr>
             <a:r>
+              <a:rPr/>
               <a:t>週次レトロスペクティブ</a:t>
             </a:r>
           </a:p>
@@ -11091,6 +11375,7 @@
               <a:buChar char="●"/>
             </a:pPr>
             <a:r>
+              <a:rPr/>
               <a:t>トリガー: /librarian</a:t>
             </a:r>
           </a:p>
@@ -11135,7 +11420,9 @@
           <a:bodyPr rtlCol="0" anchor="ctr"/>
           <a:lstStyle/>
           <a:p>
-            <a:pPr algn="ctr"/>
+            <a:pPr algn="ctr">
+              <a:defRPr/>
+            </a:pPr>
           </a:p>
         </p:txBody>
       </p:sp>
@@ -11204,7 +11491,9 @@
           <a:bodyPr rtlCol="0" anchor="ctr"/>
           <a:lstStyle/>
           <a:p>
-            <a:pPr algn="ctr"/>
+            <a:pPr algn="ctr">
+              <a:defRPr/>
+            </a:pPr>
           </a:p>
         </p:txBody>
       </p:sp>
@@ -11239,6 +11528,7 @@
               </a:defRPr>
             </a:pPr>
             <a:r>
+              <a:rPr/>
               <a:t>🟠 ビジネスチーム</a:t>
             </a:r>
           </a:p>
@@ -11252,7 +11542,7 @@
         </p:nvSpPr>
         <p:spPr>
           <a:xfrm>
-            <a:off x="640080" y="777240"/>
+            <a:off x="640080" y="841247"/>
             <a:ext cx="7315200" cy="365760"/>
           </a:xfrm>
           <a:prstGeom prst="rect">
@@ -11275,6 +11565,7 @@
               </a:defRPr>
             </a:pPr>
             <a:r>
+              <a:rPr/>
               <a:t>学びを届ける4エージェント</a:t>
             </a:r>
           </a:p>
@@ -11319,7 +11610,9 @@
           <a:bodyPr rtlCol="0" anchor="ctr"/>
           <a:lstStyle/>
           <a:p>
-            <a:pPr algn="ctr"/>
+            <a:pPr algn="ctr">
+              <a:defRPr/>
+            </a:pPr>
           </a:p>
         </p:txBody>
       </p:sp>
@@ -11332,7 +11625,7 @@
         <p:spPr>
           <a:xfrm>
             <a:off x="594360" y="1371600"/>
-            <a:ext cx="1645920" cy="365760"/>
+            <a:ext cx="1645920" cy="375920"/>
           </a:xfrm>
           <a:prstGeom prst="rect">
             <a:avLst/>
@@ -11354,6 +11647,7 @@
               </a:defRPr>
             </a:pPr>
             <a:r>
+              <a:rPr/>
               <a:t>Writer</a:t>
             </a:r>
           </a:p>
@@ -11368,7 +11662,7 @@
         <p:spPr>
           <a:xfrm>
             <a:off x="594360" y="1783080"/>
-            <a:ext cx="1645920" cy="274320"/>
+            <a:ext cx="1645920" cy="287020"/>
           </a:xfrm>
           <a:prstGeom prst="rect">
             <a:avLst/>
@@ -11390,6 +11684,7 @@
               </a:defRPr>
             </a:pPr>
             <a:r>
+              <a:rPr/>
               <a:t>制作部長</a:t>
             </a:r>
           </a:p>
@@ -11434,7 +11729,9 @@
           <a:bodyPr rtlCol="0" anchor="ctr"/>
           <a:lstStyle/>
           <a:p>
-            <a:pPr algn="ctr"/>
+            <a:pPr algn="ctr">
+              <a:defRPr/>
+            </a:pPr>
           </a:p>
         </p:txBody>
       </p:sp>
@@ -11447,7 +11744,7 @@
         <p:spPr>
           <a:xfrm>
             <a:off x="2743200" y="1371600"/>
-            <a:ext cx="1645920" cy="365760"/>
+            <a:ext cx="1645920" cy="375920"/>
           </a:xfrm>
           <a:prstGeom prst="rect">
             <a:avLst/>
@@ -11469,6 +11766,7 @@
               </a:defRPr>
             </a:pPr>
             <a:r>
+              <a:rPr/>
               <a:t>Editor</a:t>
             </a:r>
           </a:p>
@@ -11483,7 +11781,7 @@
         <p:spPr>
           <a:xfrm>
             <a:off x="2743200" y="1783080"/>
-            <a:ext cx="1645920" cy="274320"/>
+            <a:ext cx="1645920" cy="287020"/>
           </a:xfrm>
           <a:prstGeom prst="rect">
             <a:avLst/>
@@ -11505,6 +11803,7 @@
               </a:defRPr>
             </a:pPr>
             <a:r>
+              <a:rPr/>
               <a:t>品質管理部長</a:t>
             </a:r>
           </a:p>
@@ -11549,7 +11848,9 @@
           <a:bodyPr rtlCol="0" anchor="ctr"/>
           <a:lstStyle/>
           <a:p>
-            <a:pPr algn="ctr"/>
+            <a:pPr algn="ctr">
+              <a:defRPr/>
+            </a:pPr>
           </a:p>
         </p:txBody>
       </p:sp>
@@ -11562,7 +11863,7 @@
         <p:spPr>
           <a:xfrm>
             <a:off x="4892040" y="1371600"/>
-            <a:ext cx="1645920" cy="365760"/>
+            <a:ext cx="1645920" cy="375920"/>
           </a:xfrm>
           <a:prstGeom prst="rect">
             <a:avLst/>
@@ -11584,6 +11885,7 @@
               </a:defRPr>
             </a:pPr>
             <a:r>
+              <a:rPr/>
               <a:t>Publisher</a:t>
             </a:r>
           </a:p>
@@ -11598,7 +11900,7 @@
         <p:spPr>
           <a:xfrm>
             <a:off x="4892040" y="1783080"/>
-            <a:ext cx="1645920" cy="274320"/>
+            <a:ext cx="1645920" cy="287020"/>
           </a:xfrm>
           <a:prstGeom prst="rect">
             <a:avLst/>
@@ -11620,6 +11922,7 @@
               </a:defRPr>
             </a:pPr>
             <a:r>
+              <a:rPr/>
               <a:t>配信部長</a:t>
             </a:r>
           </a:p>
@@ -11664,7 +11967,9 @@
           <a:bodyPr rtlCol="0" anchor="ctr"/>
           <a:lstStyle/>
           <a:p>
-            <a:pPr algn="ctr"/>
+            <a:pPr algn="ctr">
+              <a:defRPr/>
+            </a:pPr>
           </a:p>
         </p:txBody>
       </p:sp>
@@ -11677,7 +11982,7 @@
         <p:spPr>
           <a:xfrm>
             <a:off x="7040880" y="1371600"/>
-            <a:ext cx="1645920" cy="365760"/>
+            <a:ext cx="1645920" cy="375920"/>
           </a:xfrm>
           <a:prstGeom prst="rect">
             <a:avLst/>
@@ -11699,6 +12004,7 @@
               </a:defRPr>
             </a:pPr>
             <a:r>
+              <a:rPr/>
               <a:t>Marketer</a:t>
             </a:r>
           </a:p>
@@ -11713,7 +12019,7 @@
         <p:spPr>
           <a:xfrm>
             <a:off x="7040880" y="1783080"/>
-            <a:ext cx="1645920" cy="274320"/>
+            <a:ext cx="1645920" cy="287020"/>
           </a:xfrm>
           <a:prstGeom prst="rect">
             <a:avLst/>
@@ -11735,6 +12041,7 @@
               </a:defRPr>
             </a:pPr>
             <a:r>
+              <a:rPr/>
               <a:t>グロース部長</a:t>
             </a:r>
           </a:p>
@@ -11779,7 +12086,9 @@
           <a:bodyPr rtlCol="0" anchor="ctr"/>
           <a:lstStyle/>
           <a:p>
-            <a:pPr algn="ctr"/>
+            <a:pPr algn="ctr">
+              <a:defRPr/>
+            </a:pPr>
           </a:p>
         </p:txBody>
       </p:sp>
@@ -11814,6 +12123,7 @@
               </a:defRPr>
             </a:pPr>
             <a:r>
+              <a:rPr/>
               <a:t>Scout → Analyst → CEO → Writer → Editor → CEO → Publisher → Marketer</a:t>
             </a:r>
           </a:p>
@@ -11828,7 +12138,7 @@
         <p:spPr>
           <a:xfrm>
             <a:off x="640080" y="3200400"/>
-            <a:ext cx="3657600" cy="320040"/>
+            <a:ext cx="3657600" cy="340360"/>
           </a:xfrm>
           <a:prstGeom prst="rect">
             <a:avLst/>
@@ -11850,6 +12160,7 @@
               </a:defRPr>
             </a:pPr>
             <a:r>
+              <a:rPr/>
               <a:t>コンテンツの4本柱</a:t>
             </a:r>
           </a:p>
@@ -11894,7 +12205,9 @@
           <a:bodyPr rtlCol="0" anchor="ctr"/>
           <a:lstStyle/>
           <a:p>
-            <a:pPr algn="ctr"/>
+            <a:pPr algn="ctr">
+              <a:defRPr/>
+            </a:pPr>
           </a:p>
         </p:txBody>
       </p:sp>
@@ -11929,6 +12242,7 @@
               </a:defRPr>
             </a:pPr>
             <a:r>
+              <a:rPr/>
               <a:t>学び方のデザイン</a:t>
             </a:r>
           </a:p>
@@ -11973,7 +12287,9 @@
           <a:bodyPr rtlCol="0" anchor="ctr"/>
           <a:lstStyle/>
           <a:p>
-            <a:pPr algn="ctr"/>
+            <a:pPr algn="ctr">
+              <a:defRPr/>
+            </a:pPr>
           </a:p>
         </p:txBody>
       </p:sp>
@@ -12008,6 +12324,7 @@
               </a:defRPr>
             </a:pPr>
             <a:r>
+              <a:rPr/>
               <a:t>AIエージェント一人会社</a:t>
             </a:r>
           </a:p>
@@ -12052,7 +12369,9 @@
           <a:bodyPr rtlCol="0" anchor="ctr"/>
           <a:lstStyle/>
           <a:p>
-            <a:pPr algn="ctr"/>
+            <a:pPr algn="ctr">
+              <a:defRPr/>
+            </a:pPr>
           </a:p>
         </p:txBody>
       </p:sp>
@@ -12087,6 +12406,7 @@
               </a:defRPr>
             </a:pPr>
             <a:r>
+              <a:rPr/>
               <a:t>家庭医の視点</a:t>
             </a:r>
           </a:p>
@@ -12131,7 +12451,9 @@
           <a:bodyPr rtlCol="0" anchor="ctr"/>
           <a:lstStyle/>
           <a:p>
-            <a:pPr algn="ctr"/>
+            <a:pPr algn="ctr">
+              <a:defRPr/>
+            </a:pPr>
           </a:p>
         </p:txBody>
       </p:sp>
@@ -12166,6 +12488,7 @@
               </a:defRPr>
             </a:pPr>
             <a:r>
+              <a:rPr/>
               <a:t>趣味で学ぶID</a:t>
             </a:r>
           </a:p>
@@ -12236,7 +12559,9 @@
           <a:bodyPr rtlCol="0" anchor="ctr"/>
           <a:lstStyle/>
           <a:p>
-            <a:pPr algn="ctr"/>
+            <a:pPr algn="ctr">
+              <a:defRPr/>
+            </a:pPr>
           </a:p>
         </p:txBody>
       </p:sp>
@@ -12271,6 +12596,7 @@
               </a:defRPr>
             </a:pPr>
             <a:r>
+              <a:rPr/>
               <a:t>Writer &amp; Editor — 制作と品質保証</a:t>
             </a:r>
           </a:p>
@@ -12285,7 +12611,7 @@
         <p:spPr>
           <a:xfrm>
             <a:off x="640080" y="914400"/>
-            <a:ext cx="3840480" cy="365760"/>
+            <a:ext cx="3840480" cy="375920"/>
           </a:xfrm>
           <a:prstGeom prst="rect">
             <a:avLst/>
@@ -12307,6 +12633,7 @@
               </a:defRPr>
             </a:pPr>
             <a:r>
+              <a:rPr/>
               <a:t>Writer — 制作部長</a:t>
             </a:r>
           </a:p>
@@ -12669,6 +12996,7 @@
               </a:defRPr>
             </a:pPr>
             <a:r>
+              <a:rPr/>
               <a:t>トリガー: /writer [テーマ]</a:t>
             </a:r>
           </a:p>
@@ -12683,7 +13011,7 @@
         <p:spPr>
           <a:xfrm>
             <a:off x="4846320" y="914400"/>
-            <a:ext cx="3840480" cy="365760"/>
+            <a:ext cx="3840480" cy="375920"/>
           </a:xfrm>
           <a:prstGeom prst="rect">
             <a:avLst/>
@@ -12705,6 +13033,7 @@
               </a:defRPr>
             </a:pPr>
             <a:r>
+              <a:rPr/>
               <a:t>Editor — 品質管理部長</a:t>
             </a:r>
           </a:p>
@@ -12742,6 +13071,7 @@
               <a:buChar char="●"/>
             </a:pPr>
             <a:r>
+              <a:rPr/>
               <a:t>文章品質</a:t>
             </a:r>
           </a:p>
@@ -12756,6 +13086,7 @@
               <a:buChar char="●"/>
             </a:pPr>
             <a:r>
+              <a:rPr/>
               <a:t>ファクトチェック</a:t>
             </a:r>
           </a:p>
@@ -12770,6 +13101,7 @@
               <a:buChar char="●"/>
             </a:pPr>
             <a:r>
+              <a:rPr/>
               <a:t>リスクチェック（医師法・薬機法）</a:t>
             </a:r>
           </a:p>
@@ -12784,6 +13116,7 @@
               <a:buChar char="●"/>
             </a:pPr>
             <a:r>
+              <a:rPr/>
               <a:t>SEO・発見性</a:t>
             </a:r>
           </a:p>
@@ -12798,6 +13131,7 @@
               <a:buChar char="●"/>
             </a:pPr>
             <a:r>
+              <a:rPr/>
               <a:t>ブランド一貫性</a:t>
             </a:r>
           </a:p>
@@ -12834,6 +13168,7 @@
               </a:defRPr>
             </a:pPr>
             <a:r>
+              <a:rPr/>
               <a:t>トリガー: /editor [ファイル]</a:t>
             </a:r>
           </a:p>
@@ -12878,7 +13213,9 @@
           <a:bodyPr rtlCol="0" anchor="ctr"/>
           <a:lstStyle/>
           <a:p>
-            <a:pPr algn="ctr"/>
+            <a:pPr algn="ctr">
+              <a:defRPr/>
+            </a:pPr>
           </a:p>
         </p:txBody>
       </p:sp>
@@ -12923,7 +13260,9 @@
           <a:bodyPr rtlCol="0" anchor="ctr"/>
           <a:lstStyle/>
           <a:p>
-            <a:pPr algn="ctr"/>
+            <a:pPr algn="ctr">
+              <a:defRPr/>
+            </a:pPr>
           </a:p>
         </p:txBody>
       </p:sp>
@@ -12958,6 +13297,7 @@
               </a:defRPr>
             </a:pPr>
             <a:r>
+              <a:rPr/>
               <a:t>CEOゲート: Writer→Editor の出力はたまさんの最終承認が必要</a:t>
             </a:r>
           </a:p>
